--- a/data-eng/decks/w3d1s2.pptx
+++ b/data-eng/decks/w3d1s2.pptx
@@ -3100,7 +3100,7 @@
       <p:grpSpPr/>
       <p:sp>
         <p:nvSpPr>
-          <p:cNvPr id="2" name="Oval 1"/>
+          <p:cNvPr id="2" name="deckgen:decor"/>
           <p:cNvSpPr/>
           <p:nvPr/>
         </p:nvSpPr>
@@ -3130,7 +3130,7 @@
       </p:sp>
       <p:sp>
         <p:nvSpPr>
-          <p:cNvPr id="3" name="Oval 2"/>
+          <p:cNvPr id="3" name="deckgen:decor"/>
           <p:cNvSpPr/>
           <p:nvPr/>
         </p:nvSpPr>
@@ -3160,7 +3160,7 @@
       </p:sp>
       <p:sp>
         <p:nvSpPr>
-          <p:cNvPr id="4" name="Oval 3"/>
+          <p:cNvPr id="4" name="deckgen:decor"/>
           <p:cNvSpPr/>
           <p:nvPr/>
         </p:nvSpPr>
@@ -3190,7 +3190,7 @@
       </p:sp>
       <p:sp>
         <p:nvSpPr>
-          <p:cNvPr id="5" name="Rectangle 4"/>
+          <p:cNvPr id="5" name="deckgen:decor"/>
           <p:cNvSpPr/>
           <p:nvPr/>
         </p:nvSpPr>
@@ -3220,7 +3220,7 @@
       </p:sp>
       <p:sp>
         <p:nvSpPr>
-          <p:cNvPr id="6" name="Oval 5"/>
+          <p:cNvPr id="6" name="deckgen:decor"/>
           <p:cNvSpPr/>
           <p:nvPr/>
         </p:nvSpPr>
@@ -3250,7 +3250,7 @@
       </p:sp>
       <p:sp>
         <p:nvSpPr>
-          <p:cNvPr id="7" name="Oval 6"/>
+          <p:cNvPr id="7" name="deckgen:decor"/>
           <p:cNvSpPr/>
           <p:nvPr/>
         </p:nvSpPr>
@@ -3280,7 +3280,7 @@
       </p:sp>
       <p:sp>
         <p:nvSpPr>
-          <p:cNvPr id="8" name="Oval 7"/>
+          <p:cNvPr id="8" name="deckgen:decor"/>
           <p:cNvSpPr/>
           <p:nvPr/>
         </p:nvSpPr>
@@ -3310,7 +3310,7 @@
       </p:sp>
       <p:sp>
         <p:nvSpPr>
-          <p:cNvPr id="9" name="Oval 8"/>
+          <p:cNvPr id="9" name="deckgen:decor"/>
           <p:cNvSpPr/>
           <p:nvPr/>
         </p:nvSpPr>
@@ -3340,7 +3340,7 @@
       </p:sp>
       <p:sp>
         <p:nvSpPr>
-          <p:cNvPr id="10" name="Rectangle 9"/>
+          <p:cNvPr id="10" name="deckgen:decor"/>
           <p:cNvSpPr/>
           <p:nvPr/>
         </p:nvSpPr>
@@ -3600,7 +3600,7 @@
       <p:grpSpPr/>
       <p:sp>
         <p:nvSpPr>
-          <p:cNvPr id="2" name="Oval 1"/>
+          <p:cNvPr id="2" name="deckgen:decor"/>
           <p:cNvSpPr/>
           <p:nvPr/>
         </p:nvSpPr>
@@ -3630,7 +3630,7 @@
       </p:sp>
       <p:sp>
         <p:nvSpPr>
-          <p:cNvPr id="3" name="Oval 2"/>
+          <p:cNvPr id="3" name="deckgen:decor"/>
           <p:cNvSpPr/>
           <p:nvPr/>
         </p:nvSpPr>
@@ -3660,7 +3660,7 @@
       </p:sp>
       <p:sp>
         <p:nvSpPr>
-          <p:cNvPr id="4" name="Oval 3"/>
+          <p:cNvPr id="4" name="deckgen:decor"/>
           <p:cNvSpPr/>
           <p:nvPr/>
         </p:nvSpPr>
@@ -3941,7 +3941,7 @@
                 <a:ea typeface="Pretendard"/>
                 <a:cs typeface="Pretendard"/>
               </a:rPr>
-              <a:t>pd.__version__ 이 2.x.x 로 찍힌다</a:t>
+              <a:t>pandas 3.x 와 …/week3/.venv 가 함께 찍힌다</a:t>
             </a:r>
           </a:p>
         </p:txBody>
@@ -4087,7 +4087,7 @@
                 <a:ea typeface="Pretendard"/>
                 <a:cs typeface="Pretendard"/>
               </a:rPr>
-              <a:t>「1015 행 저장 완료」 · orders.csv 가 60KB 안팎이다</a:t>
+              <a:t>「1015 행 저장 완료」 · orders.csv 가 36KB 안팎이다</a:t>
             </a:r>
           </a:p>
         </p:txBody>
@@ -4233,7 +4233,7 @@
                 <a:ea typeface="Pretendard"/>
                 <a:cs typeface="Pretendard"/>
               </a:rPr>
-              <a:t>shape 가 (1015, 6) 이고 order_date 가 object 다</a:t>
+              <a:t>shape 가 (1015, 6) 이고 order_date 가 str(pandas 2: object) 다</a:t>
             </a:r>
           </a:p>
         </p:txBody>
@@ -4808,7 +4808,7 @@
       <p:grpSpPr/>
       <p:sp>
         <p:nvSpPr>
-          <p:cNvPr id="2" name="Oval 1"/>
+          <p:cNvPr id="2" name="deckgen:decor"/>
           <p:cNvSpPr/>
           <p:nvPr/>
         </p:nvSpPr>
@@ -4838,7 +4838,7 @@
       </p:sp>
       <p:sp>
         <p:nvSpPr>
-          <p:cNvPr id="3" name="Oval 2"/>
+          <p:cNvPr id="3" name="deckgen:decor"/>
           <p:cNvSpPr/>
           <p:nvPr/>
         </p:nvSpPr>
@@ -5615,7 +5615,7 @@
       <p:grpSpPr/>
       <p:sp>
         <p:nvSpPr>
-          <p:cNvPr id="2" name="Oval 1"/>
+          <p:cNvPr id="2" name="deckgen:decor"/>
           <p:cNvSpPr/>
           <p:nvPr/>
         </p:nvSpPr>
@@ -5645,7 +5645,7 @@
       </p:sp>
       <p:sp>
         <p:nvSpPr>
-          <p:cNvPr id="3" name="Oval 2"/>
+          <p:cNvPr id="3" name="deckgen:decor"/>
           <p:cNvSpPr/>
           <p:nvPr/>
         </p:nvSpPr>
@@ -5675,7 +5675,7 @@
       </p:sp>
       <p:sp>
         <p:nvSpPr>
-          <p:cNvPr id="4" name="Oval 3"/>
+          <p:cNvPr id="4" name="deckgen:decor"/>
           <p:cNvSpPr/>
           <p:nvPr/>
         </p:nvSpPr>
@@ -6606,7 +6606,7 @@
       <p:grpSpPr/>
       <p:sp>
         <p:nvSpPr>
-          <p:cNvPr id="2" name="Oval 1"/>
+          <p:cNvPr id="2" name="deckgen:decor"/>
           <p:cNvSpPr/>
           <p:nvPr/>
         </p:nvSpPr>
@@ -6636,7 +6636,7 @@
       </p:sp>
       <p:sp>
         <p:nvSpPr>
-          <p:cNvPr id="3" name="Oval 2"/>
+          <p:cNvPr id="3" name="deckgen:decor"/>
           <p:cNvSpPr/>
           <p:nvPr/>
         </p:nvSpPr>
@@ -6666,7 +6666,7 @@
       </p:sp>
       <p:sp>
         <p:nvSpPr>
-          <p:cNvPr id="4" name="Oval 3"/>
+          <p:cNvPr id="4" name="deckgen:decor"/>
           <p:cNvSpPr/>
           <p:nvPr/>
         </p:nvSpPr>
@@ -6842,7 +6842,7 @@
                 <a:ea typeface="Pretendard"/>
                 <a:cs typeface="Pretendard"/>
               </a:rPr>
-              <a:t>2주차와 다른 폴더에 새 가상환경을 만듭니다 — 주차마다 필요한 라이브러리가 다르기 때문</a:t>
+              <a:t>실습점검에서 만든 (.venv) 를 켜고 시작 — 3~6단계는 explore.py 한 파일에 이어 붙인다</a:t>
             </a:r>
           </a:p>
         </p:txBody>
@@ -7799,7 +7799,7 @@
       <p:grpSpPr/>
       <p:sp>
         <p:nvSpPr>
-          <p:cNvPr id="2" name="Oval 1"/>
+          <p:cNvPr id="2" name="deckgen:decor"/>
           <p:cNvSpPr/>
           <p:nvPr/>
         </p:nvSpPr>
@@ -7829,7 +7829,7 @@
       </p:sp>
       <p:sp>
         <p:nvSpPr>
-          <p:cNvPr id="3" name="Oval 2"/>
+          <p:cNvPr id="3" name="deckgen:decor"/>
           <p:cNvSpPr/>
           <p:nvPr/>
         </p:nvSpPr>
@@ -7859,7 +7859,7 @@
       </p:sp>
       <p:sp>
         <p:nvSpPr>
-          <p:cNvPr id="4" name="Oval 3"/>
+          <p:cNvPr id="4" name="deckgen:decor"/>
           <p:cNvSpPr/>
           <p:nvPr/>
         </p:nvSpPr>
@@ -8008,7 +8008,7 @@
         <p:spPr>
           <a:xfrm>
             <a:off x="1143000" y="2781300"/>
-            <a:ext cx="1133142" cy="571500"/>
+            <a:ext cx="935581" cy="571500"/>
           </a:xfrm>
           <a:prstGeom prst="rect">
             <a:avLst/>
@@ -8038,7 +8038,7 @@
         <p:spPr>
           <a:xfrm>
             <a:off x="1143000" y="2781300"/>
-            <a:ext cx="1133142" cy="571500"/>
+            <a:ext cx="935581" cy="571500"/>
           </a:xfrm>
           <a:prstGeom prst="rect">
             <a:avLst/>
@@ -8078,8 +8078,8 @@
         </p:nvSpPr>
         <p:spPr>
           <a:xfrm>
-            <a:off x="2276142" y="2781300"/>
-            <a:ext cx="14868858" cy="571500"/>
+            <a:off x="2078581" y="2781300"/>
+            <a:ext cx="15066419" cy="571500"/>
           </a:xfrm>
           <a:prstGeom prst="rect">
             <a:avLst/>
@@ -8110,8 +8110,8 @@
         </p:nvSpPr>
         <p:spPr>
           <a:xfrm>
-            <a:off x="2428542" y="2781300"/>
-            <a:ext cx="14564058" cy="571500"/>
+            <a:off x="2230981" y="2781300"/>
+            <a:ext cx="14761619" cy="571500"/>
           </a:xfrm>
           <a:prstGeom prst="rect">
             <a:avLst/>
@@ -8138,7 +8138,7 @@
                 <a:ea typeface="Pretendard"/>
                 <a:cs typeface="Pretendard"/>
               </a:rPr>
-              <a:t>mkdir -p ~/data-eng/week3 · cd ~/data-eng/week3</a:t>
+              <a:t>cd ~/data-eng/week3 (실습점검에서 만들었으면 켜기만)</a:t>
             </a:r>
           </a:p>
         </p:txBody>
@@ -8152,7 +8152,7 @@
         <p:spPr>
           <a:xfrm>
             <a:off x="1143000" y="3429000"/>
-            <a:ext cx="1133142" cy="571500"/>
+            <a:ext cx="935581" cy="571500"/>
           </a:xfrm>
           <a:prstGeom prst="rect">
             <a:avLst/>
@@ -8182,7 +8182,7 @@
         <p:spPr>
           <a:xfrm>
             <a:off x="1143000" y="3429000"/>
-            <a:ext cx="1133142" cy="571500"/>
+            <a:ext cx="935581" cy="571500"/>
           </a:xfrm>
           <a:prstGeom prst="rect">
             <a:avLst/>
@@ -8209,7 +8209,7 @@
                 <a:ea typeface="Pretendard"/>
                 <a:cs typeface="Pretendard"/>
               </a:rPr>
-              <a:t>가상환경</a:t>
+              <a:t>활성화</a:t>
             </a:r>
           </a:p>
         </p:txBody>
@@ -8222,8 +8222,8 @@
         </p:nvSpPr>
         <p:spPr>
           <a:xfrm>
-            <a:off x="2276142" y="3429000"/>
-            <a:ext cx="14868858" cy="571500"/>
+            <a:off x="2078581" y="3429000"/>
+            <a:ext cx="15066419" cy="571500"/>
           </a:xfrm>
           <a:prstGeom prst="rect">
             <a:avLst/>
@@ -8254,8 +8254,8 @@
         </p:nvSpPr>
         <p:spPr>
           <a:xfrm>
-            <a:off x="2428542" y="3429000"/>
-            <a:ext cx="14564058" cy="571500"/>
+            <a:off x="2230981" y="3429000"/>
+            <a:ext cx="14761619" cy="571500"/>
           </a:xfrm>
           <a:prstGeom prst="rect">
             <a:avLst/>
@@ -8282,7 +8282,7 @@
                 <a:ea typeface="Pretendard"/>
                 <a:cs typeface="Pretendard"/>
               </a:rPr>
-              <a:t>python3 -m venv .venv</a:t>
+              <a:t>source .venv/bin/activate — OS 셋 같다</a:t>
             </a:r>
           </a:p>
         </p:txBody>
@@ -8296,7 +8296,7 @@
         <p:spPr>
           <a:xfrm>
             <a:off x="1143000" y="4076700"/>
-            <a:ext cx="1133142" cy="571500"/>
+            <a:ext cx="935581" cy="571500"/>
           </a:xfrm>
           <a:prstGeom prst="rect">
             <a:avLst/>
@@ -8326,7 +8326,7 @@
         <p:spPr>
           <a:xfrm>
             <a:off x="1143000" y="4076700"/>
-            <a:ext cx="1133142" cy="571500"/>
+            <a:ext cx="935581" cy="571500"/>
           </a:xfrm>
           <a:prstGeom prst="rect">
             <a:avLst/>
@@ -8353,7 +8353,7 @@
                 <a:ea typeface="Pretendard"/>
                 <a:cs typeface="Pretendard"/>
               </a:rPr>
-              <a:t>활성화</a:t>
+              <a:t>확인</a:t>
             </a:r>
           </a:p>
         </p:txBody>
@@ -8366,8 +8366,8 @@
         </p:nvSpPr>
         <p:spPr>
           <a:xfrm>
-            <a:off x="2276142" y="4076700"/>
-            <a:ext cx="14868858" cy="571500"/>
+            <a:off x="2078581" y="4076700"/>
+            <a:ext cx="15066419" cy="571500"/>
           </a:xfrm>
           <a:prstGeom prst="rect">
             <a:avLst/>
@@ -8398,8 +8398,8 @@
         </p:nvSpPr>
         <p:spPr>
           <a:xfrm>
-            <a:off x="2428542" y="4076700"/>
-            <a:ext cx="14564058" cy="571500"/>
+            <a:off x="2230981" y="4076700"/>
+            <a:ext cx="14761619" cy="571500"/>
           </a:xfrm>
           <a:prstGeom prst="rect">
             <a:avLst/>
@@ -8426,7 +8426,7 @@
                 <a:ea typeface="Pretendard"/>
                 <a:cs typeface="Pretendard"/>
               </a:rPr>
-              <a:t>source .venv/bin/activate</a:t>
+              <a:t>python3 -c "import sys, pandas as pd; print(pd.__version__, sys.prefix)"</a:t>
             </a:r>
           </a:p>
         </p:txBody>
@@ -8440,7 +8440,7 @@
         <p:spPr>
           <a:xfrm>
             <a:off x="1143000" y="4724400"/>
-            <a:ext cx="1133142" cy="571500"/>
+            <a:ext cx="935581" cy="571500"/>
           </a:xfrm>
           <a:prstGeom prst="rect">
             <a:avLst/>
@@ -8470,7 +8470,7 @@
         <p:spPr>
           <a:xfrm>
             <a:off x="1143000" y="4724400"/>
-            <a:ext cx="1133142" cy="571500"/>
+            <a:ext cx="935581" cy="571500"/>
           </a:xfrm>
           <a:prstGeom prst="rect">
             <a:avLst/>
@@ -8497,7 +8497,7 @@
                 <a:ea typeface="Pretendard"/>
                 <a:cs typeface="Pretendard"/>
               </a:rPr>
-              <a:t>설치</a:t>
+              <a:t>기대</a:t>
             </a:r>
           </a:p>
         </p:txBody>
@@ -8510,8 +8510,8 @@
         </p:nvSpPr>
         <p:spPr>
           <a:xfrm>
-            <a:off x="2276142" y="4724400"/>
-            <a:ext cx="14868858" cy="571500"/>
+            <a:off x="2078581" y="4724400"/>
+            <a:ext cx="15066419" cy="571500"/>
           </a:xfrm>
           <a:prstGeom prst="rect">
             <a:avLst/>
@@ -8542,8 +8542,8 @@
         </p:nvSpPr>
         <p:spPr>
           <a:xfrm>
-            <a:off x="2428542" y="4724400"/>
-            <a:ext cx="14564058" cy="571500"/>
+            <a:off x="2230981" y="4724400"/>
+            <a:ext cx="14761619" cy="571500"/>
           </a:xfrm>
           <a:prstGeom prst="rect">
             <a:avLst/>
@@ -8570,7 +8570,7 @@
                 <a:ea typeface="Pretendard"/>
                 <a:cs typeface="Pretendard"/>
               </a:rPr>
-              <a:t>pip install pandas pyarrow</a:t>
+              <a:t>pandas 3.x · …/week3/.venv — 경로가 다르면 별칭 함정</a:t>
             </a:r>
           </a:p>
         </p:txBody>
@@ -8584,7 +8584,7 @@
         <p:spPr>
           <a:xfrm>
             <a:off x="1143000" y="5372100"/>
-            <a:ext cx="1133142" cy="571500"/>
+            <a:ext cx="935581" cy="571500"/>
           </a:xfrm>
           <a:prstGeom prst="rect">
             <a:avLst/>
@@ -8614,7 +8614,7 @@
         <p:spPr>
           <a:xfrm>
             <a:off x="1143000" y="5372100"/>
-            <a:ext cx="1133142" cy="571500"/>
+            <a:ext cx="935581" cy="571500"/>
           </a:xfrm>
           <a:prstGeom prst="rect">
             <a:avLst/>
@@ -8641,7 +8641,7 @@
                 <a:ea typeface="Pretendard"/>
                 <a:cs typeface="Pretendard"/>
               </a:rPr>
-              <a:t>확인</a:t>
+              <a:t>파일</a:t>
             </a:r>
           </a:p>
         </p:txBody>
@@ -8654,8 +8654,8 @@
         </p:nvSpPr>
         <p:spPr>
           <a:xfrm>
-            <a:off x="2276142" y="5372100"/>
-            <a:ext cx="14868858" cy="571500"/>
+            <a:off x="2078581" y="5372100"/>
+            <a:ext cx="15066419" cy="571500"/>
           </a:xfrm>
           <a:prstGeom prst="rect">
             <a:avLst/>
@@ -8686,8 +8686,8 @@
         </p:nvSpPr>
         <p:spPr>
           <a:xfrm>
-            <a:off x="2428542" y="5372100"/>
-            <a:ext cx="14564058" cy="571500"/>
+            <a:off x="2230981" y="5372100"/>
+            <a:ext cx="14761619" cy="571500"/>
           </a:xfrm>
           <a:prstGeom prst="rect">
             <a:avLst/>
@@ -8714,7 +8714,7 @@
                 <a:ea typeface="Pretendard"/>
                 <a:cs typeface="Pretendard"/>
               </a:rPr>
-              <a:t>python -c "import pandas as pd; print(pd.__version__)"</a:t>
+              <a:t>코드 블록 첫 줄 주석이 파일 이름 · python3 파일이름</a:t>
             </a:r>
           </a:p>
         </p:txBody>
@@ -8755,7 +8755,7 @@
                 <a:ea typeface="Pretendard"/>
                 <a:cs typeface="Pretendard"/>
               </a:rPr>
-              <a:t>확인 포인트: 마지막 명령에서 Pandas 버전 번호(예: 2.x.x)가 출력되면 준비 완료 · WSL2·macOS·리눅스 모두 같다</a:t>
+              <a:t>확인 포인트: pandas 3.x 와 …/week3/.venv 가 함께 찍히면 준비 완료</a:t>
             </a:r>
           </a:p>
         </p:txBody>
@@ -8892,7 +8892,7 @@
       <p:grpSpPr/>
       <p:sp>
         <p:nvSpPr>
-          <p:cNvPr id="2" name="Oval 1"/>
+          <p:cNvPr id="2" name="deckgen:decor"/>
           <p:cNvSpPr/>
           <p:nvPr/>
         </p:nvSpPr>
@@ -8922,7 +8922,7 @@
       </p:sp>
       <p:sp>
         <p:nvSpPr>
-          <p:cNvPr id="3" name="Oval 2"/>
+          <p:cNvPr id="3" name="deckgen:decor"/>
           <p:cNvSpPr/>
           <p:nvPr/>
         </p:nvSpPr>
@@ -8952,7 +8952,7 @@
       </p:sp>
       <p:sp>
         <p:nvSpPr>
-          <p:cNvPr id="4" name="Oval 3"/>
+          <p:cNvPr id="4" name="deckgen:decor"/>
           <p:cNvSpPr/>
           <p:nvPr/>
         </p:nvSpPr>
@@ -10106,7 +10106,7 @@
       <p:grpSpPr/>
       <p:sp>
         <p:nvSpPr>
-          <p:cNvPr id="2" name="Oval 1"/>
+          <p:cNvPr id="2" name="deckgen:decor"/>
           <p:cNvSpPr/>
           <p:nvPr/>
         </p:nvSpPr>
@@ -10136,7 +10136,7 @@
       </p:sp>
       <p:sp>
         <p:nvSpPr>
-          <p:cNvPr id="3" name="Oval 2"/>
+          <p:cNvPr id="3" name="deckgen:decor"/>
           <p:cNvSpPr/>
           <p:nvPr/>
         </p:nvSpPr>
@@ -10166,7 +10166,7 @@
       </p:sp>
       <p:sp>
         <p:nvSpPr>
-          <p:cNvPr id="4" name="Oval 3"/>
+          <p:cNvPr id="4" name="deckgen:decor"/>
           <p:cNvSpPr/>
           <p:nvPr/>
         </p:nvSpPr>
@@ -11043,7 +11043,7 @@
                 <a:ea typeface="Pretendard"/>
                 <a:cs typeface="Pretendard"/>
               </a:rPr>
-              <a:t>결측 수까지 한눈에</a:t>
+              <a:t>결측 수까지 한눈에 — print 로 감싸면 None 이 한 줄 더</a:t>
             </a:r>
           </a:p>
         </p:txBody>
@@ -11275,7 +11275,7 @@
                 <a:ea typeface="Pretendard"/>
                 <a:cs typeface="Pretendard"/>
               </a:rPr>
-              <a:t>확인 포인트: shape (1015, 6) · order_date 가 object — CSV 는 타입을 저장하지 않아 날짜가 문자열로 읽힌 것 · price non-null 985</a:t>
+              <a:t>확인 포인트: shape (1015, 6) · order_date 가 str(pandas 2: object) — CSV 는 타입을 저장하지 않아 날짜가 문자열로 읽힌 것 · price non-null 985</a:t>
             </a:r>
           </a:p>
         </p:txBody>
@@ -11412,7 +11412,7 @@
       <p:grpSpPr/>
       <p:sp>
         <p:nvSpPr>
-          <p:cNvPr id="2" name="Oval 1"/>
+          <p:cNvPr id="2" name="deckgen:decor"/>
           <p:cNvSpPr/>
           <p:nvPr/>
         </p:nvSpPr>
@@ -11442,7 +11442,7 @@
       </p:sp>
       <p:sp>
         <p:nvSpPr>
-          <p:cNvPr id="3" name="Oval 2"/>
+          <p:cNvPr id="3" name="deckgen:decor"/>
           <p:cNvSpPr/>
           <p:nvPr/>
         </p:nvSpPr>
@@ -11472,7 +11472,7 @@
       </p:sp>
       <p:sp>
         <p:nvSpPr>
-          <p:cNvPr id="4" name="Oval 3"/>
+          <p:cNvPr id="4" name="deckgen:decor"/>
           <p:cNvSpPr/>
           <p:nvPr/>
         </p:nvSpPr>
@@ -12473,7 +12473,7 @@
       <p:grpSpPr/>
       <p:sp>
         <p:nvSpPr>
-          <p:cNvPr id="2" name="Oval 1"/>
+          <p:cNvPr id="2" name="deckgen:decor"/>
           <p:cNvSpPr/>
           <p:nvPr/>
         </p:nvSpPr>
@@ -12503,7 +12503,7 @@
       </p:sp>
       <p:sp>
         <p:nvSpPr>
-          <p:cNvPr id="3" name="Oval 2"/>
+          <p:cNvPr id="3" name="deckgen:decor"/>
           <p:cNvSpPr/>
           <p:nvPr/>
         </p:nvSpPr>
@@ -12533,7 +12533,7 @@
       </p:sp>
       <p:sp>
         <p:nvSpPr>
-          <p:cNvPr id="4" name="Oval 3"/>
+          <p:cNvPr id="4" name="deckgen:decor"/>
           <p:cNvSpPr/>
           <p:nvPr/>
         </p:nvSpPr>
@@ -12597,7 +12597,7 @@
                 <a:ea typeface="Pretendard"/>
                 <a:cs typeface="Pretendard"/>
               </a:rPr>
-              <a:t>일부러 실패시키기</a:t>
+              <a:t>3~6단계 · 한 파일에 이어 붙인다</a:t>
             </a:r>
           </a:p>
         </p:txBody>
@@ -12638,7 +12638,7 @@
                 <a:ea typeface="Pretendard"/>
                 <a:cs typeface="Pretendard"/>
               </a:rPr>
-              <a:t>CP949 로 저장한 CSV 를 그냥 읽으면</a:t>
+              <a:t>explore.py — 단계마다 끝에 더하고 다시 돌린다</a:t>
             </a:r>
           </a:p>
         </p:txBody>
@@ -12675,59 +12675,18 @@
       </p:sp>
       <p:sp>
         <p:nvSpPr>
-          <p:cNvPr id="8" name="TextBox 7"/>
-          <p:cNvSpPr txBox="1"/>
-          <p:nvPr/>
-        </p:nvSpPr>
-        <p:spPr>
-          <a:xfrm>
-            <a:off x="1143000" y="3067050"/>
-            <a:ext cx="16002000" cy="438150"/>
-          </a:xfrm>
-          <a:prstGeom prst="rect">
-            <a:avLst/>
-          </a:prstGeom>
-          <a:noFill/>
-        </p:spPr>
-        <p:txBody>
-          <a:bodyPr wrap="square" lIns="0" rIns="0" tIns="0" bIns="0" anchor="t">
-            <a:spAutoFit/>
-          </a:bodyPr>
-          <a:lstStyle/>
-          <a:p>
-            <a:pPr algn="l">
-              <a:lnSpc>
-                <a:spcPct val="130000"/>
-              </a:lnSpc>
-            </a:pPr>
-            <a:r>
-              <a:rPr sz="2550" b="1">
-                <a:solidFill>
-                  <a:srgbClr val="3D3D3D"/>
-                </a:solidFill>
-                <a:latin typeface="Pretendard"/>
-                <a:ea typeface="Pretendard"/>
-                <a:cs typeface="Pretendard"/>
-              </a:rPr>
-              <a:t>한국 공공데이터는 CP949 가 많습니다 — 오류를 한 번 보고 나면 해결이 남습니다</a:t>
-            </a:r>
-          </a:p>
-        </p:txBody>
-      </p:sp>
-      <p:sp>
-        <p:nvSpPr>
-          <p:cNvPr id="9" name="Rounded Rectangle 8"/>
+          <p:cNvPr id="8" name="Rounded Rectangle 7"/>
           <p:cNvSpPr/>
           <p:nvPr/>
         </p:nvSpPr>
         <p:spPr>
           <a:xfrm>
-            <a:off x="1143000" y="3924300"/>
-            <a:ext cx="2895600" cy="3143250"/>
+            <a:off x="1143000" y="2933700"/>
+            <a:ext cx="16002000" cy="1000125"/>
           </a:xfrm>
           <a:prstGeom prst="roundRect">
             <a:avLst>
-              <a:gd name="adj" fmla="val 1644"/>
+              <a:gd name="adj" fmla="val 4761"/>
             </a:avLst>
           </a:prstGeom>
           <a:solidFill>
@@ -12750,16 +12709,16 @@
       </p:sp>
       <p:sp>
         <p:nvSpPr>
-          <p:cNvPr id="10" name="Rectangle 9"/>
+          <p:cNvPr id="9" name="Oval 8"/>
           <p:cNvSpPr/>
           <p:nvPr/>
         </p:nvSpPr>
         <p:spPr>
           <a:xfrm>
-            <a:off x="1143000" y="3924300"/>
-            <a:ext cx="2895600" cy="914400"/>
-          </a:xfrm>
-          <a:prstGeom prst="rect">
+            <a:off x="1447800" y="3138488"/>
+            <a:ext cx="590550" cy="590550"/>
+          </a:xfrm>
+          <a:prstGeom prst="ellipse">
             <a:avLst/>
           </a:prstGeom>
           <a:solidFill>
@@ -12780,14 +12739,55 @@
       </p:sp>
       <p:sp>
         <p:nvSpPr>
+          <p:cNvPr id="10" name="TextBox 9"/>
+          <p:cNvSpPr txBox="1"/>
+          <p:nvPr/>
+        </p:nvSpPr>
+        <p:spPr>
+          <a:xfrm>
+            <a:off x="1447800" y="3290888"/>
+            <a:ext cx="590550" cy="323850"/>
+          </a:xfrm>
+          <a:prstGeom prst="rect">
+            <a:avLst/>
+          </a:prstGeom>
+          <a:noFill/>
+        </p:spPr>
+        <p:txBody>
+          <a:bodyPr wrap="square" lIns="0" rIns="0" tIns="0" bIns="0" anchor="t">
+            <a:spAutoFit/>
+          </a:bodyPr>
+          <a:lstStyle/>
+          <a:p>
+            <a:pPr algn="ctr">
+              <a:lnSpc>
+                <a:spcPct val="100000"/>
+              </a:lnSpc>
+            </a:pPr>
+            <a:r>
+              <a:rPr sz="2250" b="1">
+                <a:solidFill>
+                  <a:srgbClr val="FFFFFF"/>
+                </a:solidFill>
+                <a:latin typeface="Pretendard"/>
+                <a:ea typeface="Pretendard"/>
+                <a:cs typeface="Pretendard"/>
+              </a:rPr>
+              <a:t>1</a:t>
+            </a:r>
+          </a:p>
+        </p:txBody>
+      </p:sp>
+      <p:sp>
+        <p:nvSpPr>
           <p:cNvPr id="11" name="TextBox 10"/>
           <p:cNvSpPr txBox="1"/>
           <p:nvPr/>
         </p:nvSpPr>
         <p:spPr>
           <a:xfrm>
-            <a:off x="1143000" y="4171950"/>
-            <a:ext cx="2895600" cy="419100"/>
+            <a:off x="2324100" y="3024188"/>
+            <a:ext cx="14478000" cy="400050"/>
           </a:xfrm>
           <a:prstGeom prst="rect">
             <a:avLst/>
@@ -12800,21 +12800,21 @@
           </a:bodyPr>
           <a:lstStyle/>
           <a:p>
-            <a:pPr algn="ctr">
-              <a:lnSpc>
-                <a:spcPct val="100000"/>
+            <a:pPr algn="l">
+              <a:lnSpc>
+                <a:spcPct val="110000"/>
               </a:lnSpc>
             </a:pPr>
             <a:r>
               <a:rPr sz="2475" b="1">
                 <a:solidFill>
-                  <a:srgbClr val="FFFFFF"/>
-                </a:solidFill>
-                <a:latin typeface="Pretendard"/>
-                <a:ea typeface="Pretendard"/>
-                <a:cs typeface="Pretendard"/>
-              </a:rPr>
-              <a:t>1. CP949 저장</a:t>
+                  <a:srgbClr val="0D2B5E"/>
+                </a:solidFill>
+                <a:latin typeface="Pretendard"/>
+                <a:ea typeface="Pretendard"/>
+                <a:cs typeface="Pretendard"/>
+              </a:rPr>
+              <a:t>3단계 첫인상 5종</a:t>
             </a:r>
           </a:p>
         </p:txBody>
@@ -12827,8 +12827,8 @@
         </p:nvSpPr>
         <p:spPr>
           <a:xfrm>
-            <a:off x="1352550" y="5143500"/>
-            <a:ext cx="2476500" cy="1524000"/>
+            <a:off x="2324100" y="3481388"/>
+            <a:ext cx="14478000" cy="361950"/>
           </a:xfrm>
           <a:prstGeom prst="rect">
             <a:avLst/>
@@ -12841,13 +12841,13 @@
           </a:bodyPr>
           <a:lstStyle/>
           <a:p>
-            <a:pPr algn="ctr">
-              <a:lnSpc>
-                <a:spcPct val="146000"/>
-              </a:lnSpc>
-            </a:pPr>
-            <a:r>
-              <a:rPr sz="2100" b="0">
+            <a:pPr algn="l">
+              <a:lnSpc>
+                <a:spcPct val="120000"/>
+              </a:lnSpc>
+            </a:pPr>
+            <a:r>
+              <a:rPr sz="2025" b="0">
                 <a:solidFill>
                   <a:srgbClr val="3D3D3D"/>
                 </a:solidFill>
@@ -12855,25 +12855,7 @@
                 <a:ea typeface="Pretendard"/>
                 <a:cs typeface="Pretendard"/>
               </a:rPr>
-              <a:t>to_csv(…,</a:t>
-            </a:r>
-          </a:p>
-          <a:p>
-            <a:pPr algn="ctr">
-              <a:lnSpc>
-                <a:spcPct val="146000"/>
-              </a:lnSpc>
-            </a:pPr>
-            <a:r>
-              <a:rPr sz="2100" b="0">
-                <a:solidFill>
-                  <a:srgbClr val="3D3D3D"/>
-                </a:solidFill>
-                <a:latin typeface="Pretendard"/>
-                <a:ea typeface="Pretendard"/>
-                <a:cs typeface="Pretendard"/>
-              </a:rPr>
-              <a:t>encoding='cp949')</a:t>
+              <a:t>shape · dtypes · head · info · describe</a:t>
             </a:r>
           </a:p>
         </p:txBody>
@@ -12886,12 +12868,12 @@
         </p:nvSpPr>
         <p:spPr>
           <a:xfrm>
-            <a:off x="4419600" y="3924300"/>
-            <a:ext cx="2895600" cy="3143250"/>
+            <a:off x="1143000" y="4105275"/>
+            <a:ext cx="16002000" cy="1000125"/>
           </a:xfrm>
           <a:prstGeom prst="roundRect">
             <a:avLst>
-              <a:gd name="adj" fmla="val 1644"/>
+              <a:gd name="adj" fmla="val 4761"/>
             </a:avLst>
           </a:prstGeom>
           <a:solidFill>
@@ -12914,20 +12896,20 @@
       </p:sp>
       <p:sp>
         <p:nvSpPr>
-          <p:cNvPr id="14" name="Rectangle 13"/>
+          <p:cNvPr id="14" name="Oval 13"/>
           <p:cNvSpPr/>
           <p:nvPr/>
         </p:nvSpPr>
         <p:spPr>
           <a:xfrm>
-            <a:off x="4419600" y="3924300"/>
-            <a:ext cx="2895600" cy="914400"/>
-          </a:xfrm>
-          <a:prstGeom prst="rect">
-            <a:avLst/>
-          </a:prstGeom>
-          <a:solidFill>
-            <a:srgbClr val="1E5BC6"/>
+            <a:off x="1447800" y="4310062"/>
+            <a:ext cx="590550" cy="590550"/>
+          </a:xfrm>
+          <a:prstGeom prst="ellipse">
+            <a:avLst/>
+          </a:prstGeom>
+          <a:solidFill>
+            <a:srgbClr val="0D2B5E"/>
           </a:solidFill>
           <a:ln>
             <a:noFill/>
@@ -12950,8 +12932,8 @@
         </p:nvSpPr>
         <p:spPr>
           <a:xfrm>
-            <a:off x="4419600" y="4171950"/>
-            <a:ext cx="2895600" cy="419100"/>
+            <a:off x="1447800" y="4462462"/>
+            <a:ext cx="590550" cy="323850"/>
           </a:xfrm>
           <a:prstGeom prst="rect">
             <a:avLst/>
@@ -12970,29 +12952,70 @@
               </a:lnSpc>
             </a:pPr>
             <a:r>
+              <a:rPr sz="2250" b="1">
+                <a:solidFill>
+                  <a:srgbClr val="FFFFFF"/>
+                </a:solidFill>
+                <a:latin typeface="Pretendard"/>
+                <a:ea typeface="Pretendard"/>
+                <a:cs typeface="Pretendard"/>
+              </a:rPr>
+              <a:t>2</a:t>
+            </a:r>
+          </a:p>
+        </p:txBody>
+      </p:sp>
+      <p:sp>
+        <p:nvSpPr>
+          <p:cNvPr id="16" name="TextBox 15"/>
+          <p:cNvSpPr txBox="1"/>
+          <p:nvPr/>
+        </p:nvSpPr>
+        <p:spPr>
+          <a:xfrm>
+            <a:off x="2324100" y="4195762"/>
+            <a:ext cx="14478000" cy="400050"/>
+          </a:xfrm>
+          <a:prstGeom prst="rect">
+            <a:avLst/>
+          </a:prstGeom>
+          <a:noFill/>
+        </p:spPr>
+        <p:txBody>
+          <a:bodyPr wrap="square" lIns="0" rIns="0" tIns="0" bIns="0" anchor="t">
+            <a:spAutoFit/>
+          </a:bodyPr>
+          <a:lstStyle/>
+          <a:p>
+            <a:pPr algn="l">
+              <a:lnSpc>
+                <a:spcPct val="110000"/>
+              </a:lnSpc>
+            </a:pPr>
+            <a:r>
               <a:rPr sz="2475" b="1">
                 <a:solidFill>
-                  <a:srgbClr val="FFFFFF"/>
-                </a:solidFill>
-                <a:latin typeface="Pretendard"/>
-                <a:ea typeface="Pretendard"/>
-                <a:cs typeface="Pretendard"/>
-              </a:rPr>
-              <a:t>2. 그냥 읽기</a:t>
-            </a:r>
-          </a:p>
-        </p:txBody>
-      </p:sp>
-      <p:sp>
-        <p:nvSpPr>
-          <p:cNvPr id="16" name="TextBox 15"/>
-          <p:cNvSpPr txBox="1"/>
-          <p:nvPr/>
-        </p:nvSpPr>
-        <p:spPr>
-          <a:xfrm>
-            <a:off x="4629150" y="5143500"/>
-            <a:ext cx="2476500" cy="1524000"/>
+                  <a:srgbClr val="0D2B5E"/>
+                </a:solidFill>
+                <a:latin typeface="Pretendard"/>
+                <a:ea typeface="Pretendard"/>
+                <a:cs typeface="Pretendard"/>
+              </a:rPr>
+              <a:t>4단계 결측이 dtype 을 바꾼다</a:t>
+            </a:r>
+          </a:p>
+        </p:txBody>
+      </p:sp>
+      <p:sp>
+        <p:nvSpPr>
+          <p:cNvPr id="17" name="TextBox 16"/>
+          <p:cNvSpPr txBox="1"/>
+          <p:nvPr/>
+        </p:nvSpPr>
+        <p:spPr>
+          <a:xfrm>
+            <a:off x="2324100" y="4652962"/>
+            <a:ext cx="14478000" cy="361950"/>
           </a:xfrm>
           <a:prstGeom prst="rect">
             <a:avLst/>
@@ -13005,13 +13028,13 @@
           </a:bodyPr>
           <a:lstStyle/>
           <a:p>
-            <a:pPr algn="ctr">
-              <a:lnSpc>
-                <a:spcPct val="146000"/>
-              </a:lnSpc>
-            </a:pPr>
-            <a:r>
-              <a:rPr sz="2100" b="0">
+            <a:pPr algn="l">
+              <a:lnSpc>
+                <a:spcPct val="120000"/>
+              </a:lnSpc>
+            </a:pPr>
+            <a:r>
+              <a:rPr sz="2025" b="0">
                 <a:solidFill>
                   <a:srgbClr val="3D3D3D"/>
                 </a:solidFill>
@@ -13019,43 +13042,25 @@
                 <a:ea typeface="Pretendard"/>
                 <a:cs typeface="Pretendard"/>
               </a:rPr>
-              <a:t>pd.read_csv</a:t>
-            </a:r>
-          </a:p>
-          <a:p>
-            <a:pPr algn="ctr">
-              <a:lnSpc>
-                <a:spcPct val="146000"/>
-              </a:lnSpc>
-            </a:pPr>
-            <a:r>
-              <a:rPr sz="2100" b="0">
-                <a:solidFill>
-                  <a:srgbClr val="3D3D3D"/>
-                </a:solidFill>
-                <a:latin typeface="Pretendard"/>
-                <a:ea typeface="Pretendard"/>
-                <a:cs typeface="Pretendard"/>
-              </a:rPr>
-              <a:t>('orders.csv')</a:t>
-            </a:r>
-          </a:p>
-        </p:txBody>
-      </p:sp>
-      <p:sp>
-        <p:nvSpPr>
-          <p:cNvPr id="17" name="Rounded Rectangle 16"/>
+              <a:t>price float64(결측 30) · quantity int64 · 1000 이 1000.0 으로</a:t>
+            </a:r>
+          </a:p>
+        </p:txBody>
+      </p:sp>
+      <p:sp>
+        <p:nvSpPr>
+          <p:cNvPr id="18" name="Rounded Rectangle 17"/>
           <p:cNvSpPr/>
           <p:nvPr/>
         </p:nvSpPr>
         <p:spPr>
           <a:xfrm>
-            <a:off x="7696200" y="3924300"/>
-            <a:ext cx="2895600" cy="3143250"/>
+            <a:off x="1143000" y="5276850"/>
+            <a:ext cx="16002000" cy="1000125"/>
           </a:xfrm>
           <a:prstGeom prst="roundRect">
             <a:avLst>
-              <a:gd name="adj" fmla="val 1644"/>
+              <a:gd name="adj" fmla="val 4761"/>
             </a:avLst>
           </a:prstGeom>
           <a:solidFill>
@@ -13078,16 +13083,16 @@
       </p:sp>
       <p:sp>
         <p:nvSpPr>
-          <p:cNvPr id="18" name="Rectangle 17"/>
+          <p:cNvPr id="19" name="Oval 18"/>
           <p:cNvSpPr/>
           <p:nvPr/>
         </p:nvSpPr>
         <p:spPr>
           <a:xfrm>
-            <a:off x="7696200" y="3924300"/>
-            <a:ext cx="2895600" cy="914400"/>
-          </a:xfrm>
-          <a:prstGeom prst="rect">
+            <a:off x="1447800" y="5481638"/>
+            <a:ext cx="590550" cy="590550"/>
+          </a:xfrm>
+          <a:prstGeom prst="ellipse">
             <a:avLst/>
           </a:prstGeom>
           <a:solidFill>
@@ -13108,14 +13113,14 @@
       </p:sp>
       <p:sp>
         <p:nvSpPr>
-          <p:cNvPr id="19" name="TextBox 18"/>
-          <p:cNvSpPr txBox="1"/>
-          <p:nvPr/>
-        </p:nvSpPr>
-        <p:spPr>
-          <a:xfrm>
-            <a:off x="7696200" y="4171950"/>
-            <a:ext cx="2895600" cy="419100"/>
+          <p:cNvPr id="20" name="TextBox 19"/>
+          <p:cNvSpPr txBox="1"/>
+          <p:nvPr/>
+        </p:nvSpPr>
+        <p:spPr>
+          <a:xfrm>
+            <a:off x="1447800" y="5634038"/>
+            <a:ext cx="590550" cy="323850"/>
           </a:xfrm>
           <a:prstGeom prst="rect">
             <a:avLst/>
@@ -13134,29 +13139,70 @@
               </a:lnSpc>
             </a:pPr>
             <a:r>
+              <a:rPr sz="2250" b="1">
+                <a:solidFill>
+                  <a:srgbClr val="FFFFFF"/>
+                </a:solidFill>
+                <a:latin typeface="Pretendard"/>
+                <a:ea typeface="Pretendard"/>
+                <a:cs typeface="Pretendard"/>
+              </a:rPr>
+              <a:t>3</a:t>
+            </a:r>
+          </a:p>
+        </p:txBody>
+      </p:sp>
+      <p:sp>
+        <p:nvSpPr>
+          <p:cNvPr id="21" name="TextBox 20"/>
+          <p:cNvSpPr txBox="1"/>
+          <p:nvPr/>
+        </p:nvSpPr>
+        <p:spPr>
+          <a:xfrm>
+            <a:off x="2324100" y="5367338"/>
+            <a:ext cx="14478000" cy="400050"/>
+          </a:xfrm>
+          <a:prstGeom prst="rect">
+            <a:avLst/>
+          </a:prstGeom>
+          <a:noFill/>
+        </p:spPr>
+        <p:txBody>
+          <a:bodyPr wrap="square" lIns="0" rIns="0" tIns="0" bIns="0" anchor="t">
+            <a:spAutoFit/>
+          </a:bodyPr>
+          <a:lstStyle/>
+          <a:p>
+            <a:pPr algn="l">
+              <a:lnSpc>
+                <a:spcPct val="110000"/>
+              </a:lnSpc>
+            </a:pPr>
+            <a:r>
               <a:rPr sz="2475" b="1">
                 <a:solidFill>
-                  <a:srgbClr val="FFFFFF"/>
-                </a:solidFill>
-                <a:latin typeface="Pretendard"/>
-                <a:ea typeface="Pretendard"/>
-                <a:cs typeface="Pretendard"/>
-              </a:rPr>
-              <a:t>3. 오류 확인</a:t>
-            </a:r>
-          </a:p>
-        </p:txBody>
-      </p:sp>
-      <p:sp>
-        <p:nvSpPr>
-          <p:cNvPr id="20" name="TextBox 19"/>
-          <p:cNvSpPr txBox="1"/>
-          <p:nvPr/>
-        </p:nvSpPr>
-        <p:spPr>
-          <a:xfrm>
-            <a:off x="7905750" y="5143500"/>
-            <a:ext cx="2476500" cy="1524000"/>
+                  <a:srgbClr val="0D2B5E"/>
+                </a:solidFill>
+                <a:latin typeface="Pretendard"/>
+                <a:ea typeface="Pretendard"/>
+                <a:cs typeface="Pretendard"/>
+              </a:rPr>
+              <a:t>5단계 Parquet 로 저장·크기 비교</a:t>
+            </a:r>
+          </a:p>
+        </p:txBody>
+      </p:sp>
+      <p:sp>
+        <p:nvSpPr>
+          <p:cNvPr id="22" name="TextBox 21"/>
+          <p:cNvSpPr txBox="1"/>
+          <p:nvPr/>
+        </p:nvSpPr>
+        <p:spPr>
+          <a:xfrm>
+            <a:off x="2324100" y="5824538"/>
+            <a:ext cx="14478000" cy="361950"/>
           </a:xfrm>
           <a:prstGeom prst="rect">
             <a:avLst/>
@@ -13169,13 +13215,13 @@
           </a:bodyPr>
           <a:lstStyle/>
           <a:p>
-            <a:pPr algn="ctr">
-              <a:lnSpc>
-                <a:spcPct val="146000"/>
-              </a:lnSpc>
-            </a:pPr>
-            <a:r>
-              <a:rPr sz="2100" b="0">
+            <a:pPr algn="l">
+              <a:lnSpc>
+                <a:spcPct val="120000"/>
+              </a:lnSpc>
+            </a:pPr>
+            <a:r>
+              <a:rPr sz="2025" b="0">
                 <a:solidFill>
                   <a:srgbClr val="3D3D3D"/>
                 </a:solidFill>
@@ -13183,43 +13229,25 @@
                 <a:ea typeface="Pretendard"/>
                 <a:cs typeface="Pretendard"/>
               </a:rPr>
-              <a:t>Unicode</a:t>
-            </a:r>
-          </a:p>
-          <a:p>
-            <a:pPr algn="ctr">
-              <a:lnSpc>
-                <a:spcPct val="146000"/>
-              </a:lnSpc>
-            </a:pPr>
-            <a:r>
-              <a:rPr sz="2100" b="0">
-                <a:solidFill>
-                  <a:srgbClr val="3D3D3D"/>
-                </a:solidFill>
-                <a:latin typeface="Pretendard"/>
-                <a:ea typeface="Pretendard"/>
-                <a:cs typeface="Pretendard"/>
-              </a:rPr>
-              <a:t>DecodeError</a:t>
-            </a:r>
-          </a:p>
-        </p:txBody>
-      </p:sp>
-      <p:sp>
-        <p:nvSpPr>
-          <p:cNvPr id="21" name="Rounded Rectangle 20"/>
+              <a:t>CSV 36,244 · Parquet 15,092 bytes (42%)</a:t>
+            </a:r>
+          </a:p>
+        </p:txBody>
+      </p:sp>
+      <p:sp>
+        <p:nvSpPr>
+          <p:cNvPr id="23" name="Rounded Rectangle 22"/>
           <p:cNvSpPr/>
           <p:nvPr/>
         </p:nvSpPr>
         <p:spPr>
           <a:xfrm>
-            <a:off x="10972800" y="3924300"/>
-            <a:ext cx="2895600" cy="3143250"/>
+            <a:off x="1143000" y="6448425"/>
+            <a:ext cx="16002000" cy="1000125"/>
           </a:xfrm>
           <a:prstGeom prst="roundRect">
             <a:avLst>
-              <a:gd name="adj" fmla="val 1644"/>
+              <a:gd name="adj" fmla="val 4761"/>
             </a:avLst>
           </a:prstGeom>
           <a:solidFill>
@@ -13242,20 +13270,20 @@
       </p:sp>
       <p:sp>
         <p:nvSpPr>
-          <p:cNvPr id="22" name="Rectangle 21"/>
+          <p:cNvPr id="24" name="Oval 23"/>
           <p:cNvSpPr/>
           <p:nvPr/>
         </p:nvSpPr>
         <p:spPr>
           <a:xfrm>
-            <a:off x="10972800" y="3924300"/>
-            <a:ext cx="2895600" cy="914400"/>
-          </a:xfrm>
-          <a:prstGeom prst="rect">
-            <a:avLst/>
-          </a:prstGeom>
-          <a:solidFill>
-            <a:srgbClr val="1E5BC6"/>
+            <a:off x="1447800" y="6653212"/>
+            <a:ext cx="590550" cy="590550"/>
+          </a:xfrm>
+          <a:prstGeom prst="ellipse">
+            <a:avLst/>
+          </a:prstGeom>
+          <a:solidFill>
+            <a:srgbClr val="0D2B5E"/>
           </a:solidFill>
           <a:ln>
             <a:noFill/>
@@ -13272,14 +13300,14 @@
       </p:sp>
       <p:sp>
         <p:nvSpPr>
-          <p:cNvPr id="23" name="TextBox 22"/>
-          <p:cNvSpPr txBox="1"/>
-          <p:nvPr/>
-        </p:nvSpPr>
-        <p:spPr>
-          <a:xfrm>
-            <a:off x="10972800" y="4171950"/>
-            <a:ext cx="2895600" cy="419100"/>
+          <p:cNvPr id="25" name="TextBox 24"/>
+          <p:cNvSpPr txBox="1"/>
+          <p:nvPr/>
+        </p:nvSpPr>
+        <p:spPr>
+          <a:xfrm>
+            <a:off x="1447800" y="6805612"/>
+            <a:ext cx="590550" cy="323850"/>
           </a:xfrm>
           <a:prstGeom prst="rect">
             <a:avLst/>
@@ -13298,29 +13326,70 @@
               </a:lnSpc>
             </a:pPr>
             <a:r>
+              <a:rPr sz="2250" b="1">
+                <a:solidFill>
+                  <a:srgbClr val="FFFFFF"/>
+                </a:solidFill>
+                <a:latin typeface="Pretendard"/>
+                <a:ea typeface="Pretendard"/>
+                <a:cs typeface="Pretendard"/>
+              </a:rPr>
+              <a:t>4</a:t>
+            </a:r>
+          </a:p>
+        </p:txBody>
+      </p:sp>
+      <p:sp>
+        <p:nvSpPr>
+          <p:cNvPr id="26" name="TextBox 25"/>
+          <p:cNvSpPr txBox="1"/>
+          <p:nvPr/>
+        </p:nvSpPr>
+        <p:spPr>
+          <a:xfrm>
+            <a:off x="2324100" y="6538912"/>
+            <a:ext cx="14478000" cy="400050"/>
+          </a:xfrm>
+          <a:prstGeom prst="rect">
+            <a:avLst/>
+          </a:prstGeom>
+          <a:noFill/>
+        </p:spPr>
+        <p:txBody>
+          <a:bodyPr wrap="square" lIns="0" rIns="0" tIns="0" bIns="0" anchor="t">
+            <a:spAutoFit/>
+          </a:bodyPr>
+          <a:lstStyle/>
+          <a:p>
+            <a:pPr algn="l">
+              <a:lnSpc>
+                <a:spcPct val="110000"/>
+              </a:lnSpc>
+            </a:pPr>
+            <a:r>
               <a:rPr sz="2475" b="1">
                 <a:solidFill>
-                  <a:srgbClr val="FFFFFF"/>
-                </a:solidFill>
-                <a:latin typeface="Pretendard"/>
-                <a:ea typeface="Pretendard"/>
-                <a:cs typeface="Pretendard"/>
-              </a:rPr>
-              <a:t>4. 고쳐 읽기</a:t>
-            </a:r>
-          </a:p>
-        </p:txBody>
-      </p:sp>
-      <p:sp>
-        <p:nvSpPr>
-          <p:cNvPr id="24" name="TextBox 23"/>
-          <p:cNvSpPr txBox="1"/>
-          <p:nvPr/>
-        </p:nvSpPr>
-        <p:spPr>
-          <a:xfrm>
-            <a:off x="11182350" y="5143500"/>
-            <a:ext cx="2476500" cy="1524000"/>
+                  <a:srgbClr val="0D2B5E"/>
+                </a:solidFill>
+                <a:latin typeface="Pretendard"/>
+                <a:ea typeface="Pretendard"/>
+                <a:cs typeface="Pretendard"/>
+              </a:rPr>
+              <a:t>6단계 필요한 열만 읽기</a:t>
+            </a:r>
+          </a:p>
+        </p:txBody>
+      </p:sp>
+      <p:sp>
+        <p:nvSpPr>
+          <p:cNvPr id="27" name="TextBox 26"/>
+          <p:cNvSpPr txBox="1"/>
+          <p:nvPr/>
+        </p:nvSpPr>
+        <p:spPr>
+          <a:xfrm>
+            <a:off x="2324100" y="6996112"/>
+            <a:ext cx="14478000" cy="361950"/>
           </a:xfrm>
           <a:prstGeom prst="rect">
             <a:avLst/>
@@ -13333,13 +13402,13 @@
           </a:bodyPr>
           <a:lstStyle/>
           <a:p>
-            <a:pPr algn="ctr">
-              <a:lnSpc>
-                <a:spcPct val="146000"/>
-              </a:lnSpc>
-            </a:pPr>
-            <a:r>
-              <a:rPr sz="2100" b="0">
+            <a:pPr algn="l">
+              <a:lnSpc>
+                <a:spcPct val="120000"/>
+              </a:lnSpc>
+            </a:pPr>
+            <a:r>
+              <a:rPr sz="2025" b="0">
                 <a:solidFill>
                   <a:srgbClr val="3D3D3D"/>
                 </a:solidFill>
@@ -13347,79 +13416,27 @@
                 <a:ea typeface="Pretendard"/>
                 <a:cs typeface="Pretendard"/>
               </a:rPr>
-              <a:t>encoding=</a:t>
-            </a:r>
-          </a:p>
-          <a:p>
-            <a:pPr algn="ctr">
-              <a:lnSpc>
-                <a:spcPct val="146000"/>
-              </a:lnSpc>
-            </a:pPr>
-            <a:r>
-              <a:rPr sz="2100" b="0">
-                <a:solidFill>
-                  <a:srgbClr val="3D3D3D"/>
-                </a:solidFill>
-                <a:latin typeface="Pretendard"/>
-                <a:ea typeface="Pretendard"/>
-                <a:cs typeface="Pretendard"/>
-              </a:rPr>
-              <a:t>'cp949'</a:t>
-            </a:r>
-          </a:p>
-        </p:txBody>
-      </p:sp>
-      <p:sp>
-        <p:nvSpPr>
-          <p:cNvPr id="25" name="Rounded Rectangle 24"/>
+              <a:t>columns=['category','price'] → (1015, 2)</a:t>
+            </a:r>
+          </a:p>
+        </p:txBody>
+      </p:sp>
+      <p:sp>
+        <p:nvSpPr>
+          <p:cNvPr id="28" name="Rectangle 27"/>
           <p:cNvSpPr/>
           <p:nvPr/>
         </p:nvSpPr>
         <p:spPr>
           <a:xfrm>
-            <a:off x="14249400" y="3924300"/>
-            <a:ext cx="2895600" cy="3143250"/>
-          </a:xfrm>
-          <a:prstGeom prst="roundRect">
-            <a:avLst>
-              <a:gd name="adj" fmla="val 1644"/>
-            </a:avLst>
-          </a:prstGeom>
-          <a:solidFill>
-            <a:srgbClr val="FAFBFD"/>
-          </a:solidFill>
-          <a:ln w="9525">
-            <a:solidFill>
-              <a:srgbClr val="DCE1E8"/>
-            </a:solidFill>
-          </a:ln>
-          <a:effectLst/>
-        </p:spPr>
-        <p:txBody>
-          <a:bodyPr rtlCol="0" anchor="ctr" wrap="square"/>
-          <a:lstStyle/>
-          <a:p>
-            <a:pPr algn="ctr"/>
-          </a:p>
-        </p:txBody>
-      </p:sp>
-      <p:sp>
-        <p:nvSpPr>
-          <p:cNvPr id="26" name="Rectangle 25"/>
-          <p:cNvSpPr/>
-          <p:nvPr/>
-        </p:nvSpPr>
-        <p:spPr>
-          <a:xfrm>
-            <a:off x="14249400" y="3924300"/>
-            <a:ext cx="2895600" cy="914400"/>
-          </a:xfrm>
-          <a:prstGeom prst="rect">
-            <a:avLst/>
-          </a:prstGeom>
-          <a:solidFill>
-            <a:srgbClr val="0D2B5E"/>
+            <a:off x="1143000" y="7581900"/>
+            <a:ext cx="38100" cy="323850"/>
+          </a:xfrm>
+          <a:prstGeom prst="rect">
+            <a:avLst/>
+          </a:prstGeom>
+          <a:solidFill>
+            <a:srgbClr val="BFD3F5"/>
           </a:solidFill>
           <a:ln>
             <a:noFill/>
@@ -13436,14 +13453,14 @@
       </p:sp>
       <p:sp>
         <p:nvSpPr>
-          <p:cNvPr id="27" name="TextBox 26"/>
-          <p:cNvSpPr txBox="1"/>
-          <p:nvPr/>
-        </p:nvSpPr>
-        <p:spPr>
-          <a:xfrm>
-            <a:off x="14249400" y="4171950"/>
-            <a:ext cx="2895600" cy="419100"/>
+          <p:cNvPr id="29" name="TextBox 28"/>
+          <p:cNvSpPr txBox="1"/>
+          <p:nvPr/>
+        </p:nvSpPr>
+        <p:spPr>
+          <a:xfrm>
+            <a:off x="1314450" y="7581900"/>
+            <a:ext cx="15830550" cy="342900"/>
           </a:xfrm>
           <a:prstGeom prst="rect">
             <a:avLst/>
@@ -13456,87 +13473,28 @@
           </a:bodyPr>
           <a:lstStyle/>
           <a:p>
-            <a:pPr algn="ctr">
+            <a:pPr algn="l">
               <a:lnSpc>
                 <a:spcPct val="100000"/>
               </a:lnSpc>
             </a:pPr>
             <a:r>
-              <a:rPr sz="2475" b="1">
-                <a:solidFill>
-                  <a:srgbClr val="FFFFFF"/>
-                </a:solidFill>
-                <a:latin typeface="Pretendard"/>
-                <a:ea typeface="Pretendard"/>
-                <a:cs typeface="Pretendard"/>
-              </a:rPr>
-              <a:t>5. 원본 복구</a:t>
-            </a:r>
-          </a:p>
-        </p:txBody>
-      </p:sp>
-      <p:sp>
-        <p:nvSpPr>
-          <p:cNvPr id="28" name="TextBox 27"/>
-          <p:cNvSpPr txBox="1"/>
-          <p:nvPr/>
-        </p:nvSpPr>
-        <p:spPr>
-          <a:xfrm>
-            <a:off x="14458950" y="5143500"/>
-            <a:ext cx="2476500" cy="1524000"/>
-          </a:xfrm>
-          <a:prstGeom prst="rect">
-            <a:avLst/>
-          </a:prstGeom>
-          <a:noFill/>
-        </p:spPr>
-        <p:txBody>
-          <a:bodyPr wrap="square" lIns="0" rIns="0" tIns="0" bIns="0" anchor="t">
-            <a:spAutoFit/>
-          </a:bodyPr>
-          <a:lstStyle/>
-          <a:p>
-            <a:pPr algn="ctr">
-              <a:lnSpc>
-                <a:spcPct val="146000"/>
-              </a:lnSpc>
-            </a:pPr>
-            <a:r>
-              <a:rPr sz="2100" b="0">
-                <a:solidFill>
-                  <a:srgbClr val="3D3D3D"/>
-                </a:solidFill>
-                <a:latin typeface="Pretendard"/>
-                <a:ea typeface="Pretendard"/>
-                <a:cs typeface="Pretendard"/>
-              </a:rPr>
-              <a:t>make_orders.py</a:t>
-            </a:r>
-          </a:p>
-          <a:p>
-            <a:pPr algn="ctr">
-              <a:lnSpc>
-                <a:spcPct val="146000"/>
-              </a:lnSpc>
-            </a:pPr>
-            <a:r>
-              <a:rPr sz="2100" b="0">
-                <a:solidFill>
-                  <a:srgbClr val="3D3D3D"/>
-                </a:solidFill>
-                <a:latin typeface="Pretendard"/>
-                <a:ea typeface="Pretendard"/>
-                <a:cs typeface="Pretendard"/>
-              </a:rPr>
-              <a:t>다시 실행</a:t>
-            </a:r>
-          </a:p>
-        </p:txBody>
-      </p:sp>
-      <p:sp>
-        <p:nvSpPr>
-          <p:cNvPr id="29" name="Rectangle 28"/>
+              <a:rPr sz="1725" b="1">
+                <a:solidFill>
+                  <a:srgbClr val="7D7D7D"/>
+                </a:solidFill>
+                <a:latin typeface="Pretendard"/>
+                <a:ea typeface="Pretendard"/>
+                <a:cs typeface="Pretendard"/>
+              </a:rPr>
+              <a:t>앞 단계 출력이 매번 함께 나오는 것이 정상 — python3 대화형에서 한 줄씩 쳐도 된다</a:t>
+            </a:r>
+          </a:p>
+        </p:txBody>
+      </p:sp>
+      <p:sp>
+        <p:nvSpPr>
+          <p:cNvPr id="30" name="Rectangle 29"/>
           <p:cNvSpPr/>
           <p:nvPr/>
         </p:nvSpPr>
@@ -13566,7 +13524,7 @@
       </p:sp>
       <p:sp>
         <p:nvSpPr>
-          <p:cNvPr id="30" name="TextBox 29"/>
+          <p:cNvPr id="31" name="TextBox 30"/>
           <p:cNvSpPr txBox="1"/>
           <p:nvPr/>
         </p:nvSpPr>
@@ -13607,7 +13565,7 @@
       </p:sp>
       <p:sp>
         <p:nvSpPr>
-          <p:cNvPr id="31" name="TextBox 30"/>
+          <p:cNvPr id="32" name="TextBox 31"/>
           <p:cNvSpPr txBox="1"/>
           <p:nvPr/>
         </p:nvSpPr>
@@ -13666,7 +13624,7 @@
       <p:grpSpPr/>
       <p:sp>
         <p:nvSpPr>
-          <p:cNvPr id="2" name="Oval 1"/>
+          <p:cNvPr id="2" name="deckgen:decor"/>
           <p:cNvSpPr/>
           <p:nvPr/>
         </p:nvSpPr>
@@ -13696,7 +13654,7 @@
       </p:sp>
       <p:sp>
         <p:nvSpPr>
-          <p:cNvPr id="3" name="Oval 2"/>
+          <p:cNvPr id="3" name="deckgen:decor"/>
           <p:cNvSpPr/>
           <p:nvPr/>
         </p:nvSpPr>
@@ -13726,7 +13684,7 @@
       </p:sp>
       <p:sp>
         <p:nvSpPr>
-          <p:cNvPr id="4" name="Oval 3"/>
+          <p:cNvPr id="4" name="deckgen:decor"/>
           <p:cNvSpPr/>
           <p:nvPr/>
         </p:nvSpPr>

--- a/data-eng/decks/w3d1s2.pptx
+++ b/data-eng/decks/w3d1s2.pptx
@@ -5956,7 +5956,7 @@
                 <a:ea typeface="Pretendard"/>
                 <a:cs typeface="Pretendard"/>
               </a:rPr>
-              <a:t>~/data-eng/week3 에 venv 를 만들고 pandas·pyarrow 를 설치한다</a:t>
+              <a:t>실습점검에서 만든 week3 의 venv 를 켜고 pandas 3 과 sys.prefix 를 확인한다</a:t>
             </a:r>
           </a:p>
         </p:txBody>
